--- a/content/Lectures/Semester 1/Week 09 - Travelling Salesman Problem/5 Source Files/Travelling Salesman Problem.pptx
+++ b/content/Lectures/Semester 1/Week 09 - Travelling Salesman Problem/5 Source Files/Travelling Salesman Problem.pptx
@@ -4785,7 +4785,7 @@
                 </a14:m>
                 <a:r>
                   <a:rPr lang="en-GB" b="0" i="0" dirty="0"/>
-                  <a:t> represent whether the edge </a:t>
+                  <a:t> = 1 if the edge </a:t>
                 </a:r>
                 <a14:m>
                   <m:oMath xmlns:m="http://schemas.openxmlformats.org/officeDocument/2006/math">
@@ -4851,7 +4851,7 @@
                 </a14:m>
                 <a:r>
                   <a:rPr lang="en-GB" b="0" i="0" dirty="0"/>
-                  <a:t> and </a:t>
+                  <a:t> is used (0 otherwise), and let </a:t>
                 </a:r>
                 <a14:m>
                   <m:oMath xmlns:m="http://schemas.openxmlformats.org/officeDocument/2006/math">
@@ -5426,7 +5426,7 @@
                 </a:pPr>
                 <a:r>
                   <a:rPr lang="en-GB" b="0" dirty="0"/>
-                  <a:t>This formulation is wrong? Why?</a:t>
+                  <a:t>Why is this formulation wrong?</a:t>
                 </a:r>
               </a:p>
             </p:txBody>
@@ -8503,7 +8503,7 @@
                 </a:pPr>
                 <a:r>
                   <a:rPr lang="en-GB"/>
-                  <a:t>Hence there will be a increasing sequence of for </a:t>
+                  <a:t>Hence there will be an increasing sequence of </a:t>
                 </a:r>
                 <a14:m>
                   <m:oMath xmlns:m="http://schemas.openxmlformats.org/officeDocument/2006/math">
@@ -9164,8 +9164,33 @@
                       <a:rPr lang="en-GB" b="0" i="1" smtClean="0">
                         <a:latin typeface="Cambria Math" panose="02040503050406030204" pitchFamily="18" charset="0"/>
                       </a:rPr>
-                      <m:t>=1</m:t>
+                      <m:t>=</m:t>
                     </m:r>
+                    <m:sSub>
+                      <m:sSubPr>
+                        <m:ctrlPr>
+                          <a:rPr lang="en-GB" b="0" i="1" smtClean="0">
+                            <a:latin typeface="Cambria Math" panose="02040503050406030204" pitchFamily="18" charset="0"/>
+                          </a:rPr>
+                        </m:ctrlPr>
+                      </m:sSubPr>
+                      <m:e>
+                        <m:r>
+                          <a:rPr lang="en-GB" b="0" i="1" smtClean="0">
+                            <a:latin typeface="Cambria Math" panose="02040503050406030204" pitchFamily="18" charset="0"/>
+                          </a:rPr>
+                          <m:t>𝑟</m:t>
+                        </m:r>
+                      </m:e>
+                      <m:sub>
+                        <m:r>
+                          <a:rPr lang="en-GB" b="0" i="1" smtClean="0">
+                            <a:latin typeface="Cambria Math" panose="02040503050406030204" pitchFamily="18" charset="0"/>
+                          </a:rPr>
+                          <m:t>𝑛</m:t>
+                        </m:r>
+                      </m:sub>
+                    </m:sSub>
                   </m:oMath>
                 </a14:m>
                 <a:r>
@@ -9254,7 +9279,7 @@
                       <a:rPr lang="en-GB" b="0" i="1" smtClean="0">
                         <a:latin typeface="Cambria Math" panose="02040503050406030204" pitchFamily="18" charset="0"/>
                       </a:rPr>
-                      <m:t>𝑖</m:t>
+                      <m:t>1</m:t>
                     </m:r>
                     <m:r>
                       <a:rPr lang="en-GB" b="0" i="1" smtClean="0">
@@ -10978,11 +11003,11 @@
             </a:pPr>
             <a:r>
               <a:rPr lang="en-GB" dirty="0"/>
-              <a:t>I have created a demonstration that you can upload to Google </a:t>
+              <a:t>The demonstration notebook runs in your browser on the course site: Week 09, 2 Lecture Demos, </a:t>
             </a:r>
             <a:r>
               <a:rPr lang="en-GB" dirty="0" err="1"/>
-              <a:t>Colab</a:t>
+              <a:t>1 TSP with Pyomo.ipynb</a:t>
             </a:r>
             <a:r>
               <a:rPr lang="en-GB" dirty="0"/>
@@ -11001,7 +11026,7 @@
             </a:pPr>
             <a:r>
               <a:rPr lang="en-GB" dirty="0"/>
-              <a:t>You will find this on Blackboard.</a:t>
+              <a:t>You can also download it and run it in Google Colab or Anaconda.</a:t>
             </a:r>
           </a:p>
           <a:p>
@@ -11259,7 +11284,7 @@
                 <a:effectLst/>
                 <a:hlinkClick r:id="rId2"/>
               </a:rPr>
-              <a:t>https://colab.research.google.com/drive/1aGaOpyRexxRXKdu_it68ua8crXVCvNSl?usp=sharing</a:t>
+              <a:t>1 TSP with Pyomo.ipynb on the course site</a:t>
             </a:r>
             <a:endParaRPr lang="en-GB" b="0" i="0">
               <a:solidFill>
@@ -12392,7 +12417,7 @@
                   <a:rPr lang="en-GB">
                     <a:cs typeface="Courier New" panose="02070309020205020404" pitchFamily="49" charset="0"/>
                   </a:rPr>
-                  <a:t> Possible choices? Are we done?</a:t>
+                  <a:t> possible routes? Are we done?</a:t>
                 </a:r>
               </a:p>
               <a:p>
@@ -13486,7 +13511,7 @@
                   <a:rPr lang="en-GB">
                     <a:cs typeface="Courier New" panose="02070309020205020404" pitchFamily="49" charset="0"/>
                   </a:rPr>
-                  <a:t>That is the time taken for completion increases by approximately </a:t>
+                  <a:t>That is, the time taken grows roughly like </a:t>
                 </a:r>
                 <a14:m>
                   <m:oMath xmlns:m="http://schemas.openxmlformats.org/officeDocument/2006/math">
@@ -14025,7 +14050,7 @@
                 </a:pPr>
                 <a:r>
                   <a:rPr lang="en-GB" dirty="0"/>
-                  <a:t>					Washington Post - Feb 15</a:t>
+                  <a:t>					Washington Post - Feb 5</a:t>
                 </a:r>
                 <a:r>
                   <a:rPr lang="en-GB" baseline="30000" dirty="0"/>
@@ -14469,7 +14494,7 @@
                 </a:pPr>
                 <a:r>
                   <a:rPr lang="en-GB" dirty="0"/>
-                  <a:t>TSP is a member of the set of Non-polynomial Time problems.</a:t>
+                  <a:t>In its yes/no form (is there a tour of length at most L?) the TSP is in NP: Nondeterministic Polynomial time.</a:t>
                 </a:r>
               </a:p>
               <a:p>
@@ -14484,7 +14509,7 @@
                 </a:pPr>
                 <a:r>
                   <a:rPr lang="en-GB" dirty="0"/>
-                  <a:t>The NP bit, means you cannot find the optimal solution in polynomial time, e.g. </a:t>
+                  <a:t>The NP bit means that a proposed solution can be checked in polynomial time, i.e. </a:t>
                 </a:r>
                 <a14:m>
                   <m:oMath xmlns:m="http://schemas.openxmlformats.org/officeDocument/2006/math">
@@ -14598,7 +14623,7 @@
                 </a:pPr>
                 <a:r>
                   <a:rPr lang="en-GB" dirty="0"/>
-                  <a:t>The Complete bit means that it is easy to check the solution once you have it.</a:t>
+                  <a:t>The Complete bit means it is among the hardest problems in NP: a polynomial-time algorithm for it would give one for every problem in NP. None is known. Finding the shortest tour is NP-hard.</a:t>
                 </a:r>
               </a:p>
               <a:p>
